--- a/docs/theme-preview/pptx/simple.pptx
+++ b/docs/theme-preview/pptx/simple.pptx
@@ -10053,7 +10053,7 @@
                 <a:ea typeface="Pretendard" pitchFamily="34" charset="-122"/>
                 <a:cs typeface="Pretendard" pitchFamily="34" charset="-120"/>
               </a:rPr>
-              <a:t>Markdown Semantics</a:t>
+              <a:t>Semantic Blocks</a:t>
             </a:r>
             <a:endParaRPr lang="en-US" sz="2200" dirty="0"/>
           </a:p>
@@ -12872,7 +12872,7 @@
                 <a:ea typeface="Pretendard" pitchFamily="34" charset="-122"/>
                 <a:cs typeface="Pretendard" pitchFamily="34" charset="-120"/>
               </a:rPr>
-              <a:t>Markdown Semantics</a:t>
+              <a:t>Semantic Blocks</a:t>
             </a:r>
             <a:endParaRPr lang="en-US" sz="3400" dirty="0"/>
           </a:p>
